--- a/bench/slides/method_punchlines.pptx
+++ b/bench/slides/method_punchlines.pptx
@@ -14,6 +14,10 @@
     <p:sldId id="262" r:id="rId13"/>
     <p:sldId id="263" r:id="rId14"/>
     <p:sldId id="264" r:id="rId15"/>
+    <p:sldId id="265" r:id="rId16"/>
+    <p:sldId id="266" r:id="rId17"/>
+    <p:sldId id="267" r:id="rId18"/>
+    <p:sldId id="268" r:id="rId19"/>
   </p:sldIdLst>
   <p:sldSz cx="12191695" cy="6858000" type="screen4x3"/>
   <p:notesSz cx="6858000" cy="9144000"/>
@@ -3215,6 +3219,1372 @@
 </p:sld>
 </file>
 
+<file path=ppt/slides/slide10.xml><?xml version="1.0" encoding="utf-8"?>
+<p:sld xmlns:a="http://schemas.openxmlformats.org/drawingml/2006/main" xmlns:p="http://schemas.openxmlformats.org/presentationml/2006/main" xmlns:r="http://schemas.openxmlformats.org/officeDocument/2006/relationships">
+  <p:cSld>
+    <p:spTree>
+      <p:nvGrpSpPr>
+        <p:cNvPr id="1" name=""/>
+        <p:cNvGrpSpPr/>
+        <p:nvPr/>
+      </p:nvGrpSpPr>
+      <p:grpSpPr/>
+      <p:sp>
+        <p:nvSpPr>
+          <p:cNvPr id="2" name="Rectangle 1"/>
+          <p:cNvSpPr/>
+          <p:nvPr/>
+        </p:nvSpPr>
+        <p:spPr>
+          <a:xfrm>
+            <a:off x="0" y="0"/>
+            <a:ext cx="310896" cy="6858000"/>
+          </a:xfrm>
+          <a:prstGeom prst="rect">
+            <a:avLst/>
+          </a:prstGeom>
+          <a:solidFill>
+            <a:srgbClr val="14285A"/>
+          </a:solidFill>
+          <a:ln>
+            <a:noFill/>
+          </a:ln>
+        </p:spPr>
+        <p:style>
+          <a:lnRef idx="1">
+            <a:schemeClr val="accent1"/>
+          </a:lnRef>
+          <a:fillRef idx="3">
+            <a:schemeClr val="accent1"/>
+          </a:fillRef>
+          <a:effectRef idx="2">
+            <a:schemeClr val="accent1"/>
+          </a:effectRef>
+          <a:fontRef idx="minor">
+            <a:schemeClr val="lt1"/>
+          </a:fontRef>
+        </p:style>
+        <p:txBody>
+          <a:bodyPr rtlCol="0" anchor="ctr"/>
+          <a:lstStyle/>
+          <a:p>
+            <a:pPr algn="ctr"/>
+          </a:p>
+        </p:txBody>
+      </p:sp>
+      <p:sp>
+        <p:nvSpPr>
+          <p:cNvPr id="3" name="TextBox 2"/>
+          <p:cNvSpPr txBox="1"/>
+          <p:nvPr/>
+        </p:nvSpPr>
+        <p:spPr>
+          <a:xfrm>
+            <a:off x="777240" y="457200"/>
+            <a:ext cx="10789920" cy="457200"/>
+          </a:xfrm>
+          <a:prstGeom prst="rect">
+            <a:avLst/>
+          </a:prstGeom>
+          <a:noFill/>
+        </p:spPr>
+        <p:txBody>
+          <a:bodyPr wrap="square">
+            <a:spAutoFit/>
+          </a:bodyPr>
+          <a:lstStyle/>
+          <a:p>
+            <a:pPr algn="l"/>
+            <a:r>
+              <a:rPr sz="1600" b="1" i="0">
+                <a:solidFill>
+                  <a:srgbClr val="14285A"/>
+                </a:solidFill>
+              </a:rPr>
+              <a:t>BACKUP  ·  one framework, not four graphs</a:t>
+            </a:r>
+          </a:p>
+        </p:txBody>
+      </p:sp>
+      <p:sp>
+        <p:nvSpPr>
+          <p:cNvPr id="4" name="TextBox 3"/>
+          <p:cNvSpPr txBox="1"/>
+          <p:nvPr/>
+        </p:nvSpPr>
+        <p:spPr>
+          <a:xfrm>
+            <a:off x="777240" y="1024128"/>
+            <a:ext cx="10789920" cy="548640"/>
+          </a:xfrm>
+          <a:prstGeom prst="rect">
+            <a:avLst/>
+          </a:prstGeom>
+          <a:noFill/>
+        </p:spPr>
+        <p:txBody>
+          <a:bodyPr wrap="square">
+            <a:spAutoFit/>
+          </a:bodyPr>
+          <a:lstStyle/>
+          <a:p>
+            <a:pPr algn="l"/>
+            <a:r>
+              <a:rPr sz="1500" b="0" i="1">
+                <a:solidFill>
+                  <a:srgbClr val="6E737D"/>
+                </a:solidFill>
+              </a:rPr>
+              <a:t>if asked how the graphs relate: they are ONE object — the variation graph — at different scopes / views</a:t>
+            </a:r>
+          </a:p>
+        </p:txBody>
+      </p:sp>
+      <p:pic>
+        <p:nvPicPr>
+          <p:cNvPr id="5" name="Picture 4" descr="one_framework.png"/>
+          <p:cNvPicPr>
+            <a:picLocks noChangeAspect="1"/>
+          </p:cNvPicPr>
+          <p:nvPr/>
+        </p:nvPicPr>
+        <p:blipFill>
+          <a:blip r:embed="rId2"/>
+          <a:stretch>
+            <a:fillRect/>
+          </a:stretch>
+        </p:blipFill>
+        <p:spPr>
+          <a:xfrm>
+            <a:off x="1585446" y="1645920"/>
+            <a:ext cx="9020802" cy="4937759"/>
+          </a:xfrm>
+          <a:prstGeom prst="rect">
+            <a:avLst/>
+          </a:prstGeom>
+        </p:spPr>
+      </p:pic>
+    </p:spTree>
+  </p:cSld>
+  <p:clrMapOvr>
+    <a:masterClrMapping/>
+  </p:clrMapOvr>
+</p:sld>
+</file>
+
+<file path=ppt/slides/slide11.xml><?xml version="1.0" encoding="utf-8"?>
+<p:sld xmlns:a="http://schemas.openxmlformats.org/drawingml/2006/main" xmlns:p="http://schemas.openxmlformats.org/presentationml/2006/main" xmlns:r="http://schemas.openxmlformats.org/officeDocument/2006/relationships">
+  <p:cSld>
+    <p:spTree>
+      <p:nvGrpSpPr>
+        <p:cNvPr id="1" name=""/>
+        <p:cNvGrpSpPr/>
+        <p:nvPr/>
+      </p:nvGrpSpPr>
+      <p:grpSpPr/>
+      <p:sp>
+        <p:nvSpPr>
+          <p:cNvPr id="2" name="Rectangle 1"/>
+          <p:cNvSpPr/>
+          <p:nvPr/>
+        </p:nvSpPr>
+        <p:spPr>
+          <a:xfrm>
+            <a:off x="0" y="0"/>
+            <a:ext cx="310896" cy="6858000"/>
+          </a:xfrm>
+          <a:prstGeom prst="rect">
+            <a:avLst/>
+          </a:prstGeom>
+          <a:solidFill>
+            <a:srgbClr val="14285A"/>
+          </a:solidFill>
+          <a:ln>
+            <a:noFill/>
+          </a:ln>
+        </p:spPr>
+        <p:style>
+          <a:lnRef idx="1">
+            <a:schemeClr val="accent1"/>
+          </a:lnRef>
+          <a:fillRef idx="3">
+            <a:schemeClr val="accent1"/>
+          </a:fillRef>
+          <a:effectRef idx="2">
+            <a:schemeClr val="accent1"/>
+          </a:effectRef>
+          <a:fontRef idx="minor">
+            <a:schemeClr val="lt1"/>
+          </a:fontRef>
+        </p:style>
+        <p:txBody>
+          <a:bodyPr rtlCol="0" anchor="ctr"/>
+          <a:lstStyle/>
+          <a:p>
+            <a:pPr algn="ctr"/>
+          </a:p>
+        </p:txBody>
+      </p:sp>
+      <p:sp>
+        <p:nvSpPr>
+          <p:cNvPr id="3" name="TextBox 2"/>
+          <p:cNvSpPr txBox="1"/>
+          <p:nvPr/>
+        </p:nvSpPr>
+        <p:spPr>
+          <a:xfrm>
+            <a:off x="777240" y="457200"/>
+            <a:ext cx="10789920" cy="457200"/>
+          </a:xfrm>
+          <a:prstGeom prst="rect">
+            <a:avLst/>
+          </a:prstGeom>
+          <a:noFill/>
+        </p:spPr>
+        <p:txBody>
+          <a:bodyPr wrap="square">
+            <a:spAutoFit/>
+          </a:bodyPr>
+          <a:lstStyle/>
+          <a:p>
+            <a:pPr algn="l"/>
+            <a:r>
+              <a:rPr sz="1600" b="1" i="0">
+                <a:solidFill>
+                  <a:srgbClr val="14285A"/>
+                </a:solidFill>
+              </a:rPr>
+              <a:t>BACKUP  ·  the two formal objects</a:t>
+            </a:r>
+          </a:p>
+        </p:txBody>
+      </p:sp>
+      <p:sp>
+        <p:nvSpPr>
+          <p:cNvPr id="4" name="TextBox 3"/>
+          <p:cNvSpPr txBox="1"/>
+          <p:nvPr/>
+        </p:nvSpPr>
+        <p:spPr>
+          <a:xfrm>
+            <a:off x="777240" y="1024128"/>
+            <a:ext cx="10789920" cy="548640"/>
+          </a:xfrm>
+          <a:prstGeom prst="rect">
+            <a:avLst/>
+          </a:prstGeom>
+          <a:noFill/>
+        </p:spPr>
+        <p:txBody>
+          <a:bodyPr wrap="square">
+            <a:spAutoFit/>
+          </a:bodyPr>
+          <a:lstStyle/>
+          <a:p>
+            <a:pPr algn="l"/>
+            <a:r>
+              <a:rPr sz="1500" b="0" i="1">
+                <a:solidFill>
+                  <a:srgbClr val="6E737D"/>
+                </a:solidFill>
+              </a:rPr>
+              <a:t>if asked for the formalism: what exactly IS a family, and what is the copy number?</a:t>
+            </a:r>
+          </a:p>
+        </p:txBody>
+      </p:sp>
+      <p:pic>
+        <p:nvPicPr>
+          <p:cNvPr id="5" name="Picture 4" descr="formal_objects.png"/>
+          <p:cNvPicPr>
+            <a:picLocks noChangeAspect="1"/>
+          </p:cNvPicPr>
+          <p:nvPr/>
+        </p:nvPicPr>
+        <p:blipFill>
+          <a:blip r:embed="rId2"/>
+          <a:stretch>
+            <a:fillRect/>
+          </a:stretch>
+        </p:blipFill>
+        <p:spPr>
+          <a:xfrm>
+            <a:off x="954872" y="1783080"/>
+            <a:ext cx="10281949" cy="4297680"/>
+          </a:xfrm>
+          <a:prstGeom prst="rect">
+            <a:avLst/>
+          </a:prstGeom>
+        </p:spPr>
+      </p:pic>
+      <p:sp>
+        <p:nvSpPr>
+          <p:cNvPr id="6" name="TextBox 5"/>
+          <p:cNvSpPr txBox="1"/>
+          <p:nvPr/>
+        </p:nvSpPr>
+        <p:spPr>
+          <a:xfrm>
+            <a:off x="548640" y="6172200"/>
+            <a:ext cx="11064240" cy="548640"/>
+          </a:xfrm>
+          <a:prstGeom prst="rect">
+            <a:avLst/>
+          </a:prstGeom>
+          <a:noFill/>
+        </p:spPr>
+        <p:txBody>
+          <a:bodyPr wrap="square">
+            <a:spAutoFit/>
+          </a:bodyPr>
+          <a:lstStyle/>
+          <a:p>
+            <a:pPr algn="ctr"/>
+            <a:r>
+              <a:rPr sz="1300" b="0" i="0">
+                <a:solidFill>
+                  <a:srgbClr val="14285A"/>
+                </a:solidFill>
+              </a:rPr>
+              <a:t>family = γ-quasi-clique (dense homology cluster — not a chain, not a strict clique)    ·    copy number = χ(H) = fewest copies that explain the reads = min clique cover (a lower bound)</a:t>
+            </a:r>
+          </a:p>
+        </p:txBody>
+      </p:sp>
+    </p:spTree>
+  </p:cSld>
+  <p:clrMapOvr>
+    <a:masterClrMapping/>
+  </p:clrMapOvr>
+</p:sld>
+</file>
+
+<file path=ppt/slides/slide12.xml><?xml version="1.0" encoding="utf-8"?>
+<p:sld xmlns:a="http://schemas.openxmlformats.org/drawingml/2006/main" xmlns:p="http://schemas.openxmlformats.org/presentationml/2006/main" xmlns:r="http://schemas.openxmlformats.org/officeDocument/2006/relationships">
+  <p:cSld>
+    <p:spTree>
+      <p:nvGrpSpPr>
+        <p:cNvPr id="1" name=""/>
+        <p:cNvGrpSpPr/>
+        <p:nvPr/>
+      </p:nvGrpSpPr>
+      <p:grpSpPr/>
+      <p:sp>
+        <p:nvSpPr>
+          <p:cNvPr id="2" name="Rectangle 1"/>
+          <p:cNvSpPr/>
+          <p:nvPr/>
+        </p:nvSpPr>
+        <p:spPr>
+          <a:xfrm>
+            <a:off x="0" y="0"/>
+            <a:ext cx="310896" cy="6858000"/>
+          </a:xfrm>
+          <a:prstGeom prst="rect">
+            <a:avLst/>
+          </a:prstGeom>
+          <a:solidFill>
+            <a:srgbClr val="14285A"/>
+          </a:solidFill>
+          <a:ln>
+            <a:noFill/>
+          </a:ln>
+        </p:spPr>
+        <p:style>
+          <a:lnRef idx="1">
+            <a:schemeClr val="accent1"/>
+          </a:lnRef>
+          <a:fillRef idx="3">
+            <a:schemeClr val="accent1"/>
+          </a:fillRef>
+          <a:effectRef idx="2">
+            <a:schemeClr val="accent1"/>
+          </a:effectRef>
+          <a:fontRef idx="minor">
+            <a:schemeClr val="lt1"/>
+          </a:fontRef>
+        </p:style>
+        <p:txBody>
+          <a:bodyPr rtlCol="0" anchor="ctr"/>
+          <a:lstStyle/>
+          <a:p>
+            <a:pPr algn="ctr"/>
+          </a:p>
+        </p:txBody>
+      </p:sp>
+      <p:sp>
+        <p:nvSpPr>
+          <p:cNvPr id="3" name="TextBox 2"/>
+          <p:cNvSpPr txBox="1"/>
+          <p:nvPr/>
+        </p:nvSpPr>
+        <p:spPr>
+          <a:xfrm>
+            <a:off x="777240" y="457200"/>
+            <a:ext cx="10789920" cy="457200"/>
+          </a:xfrm>
+          <a:prstGeom prst="rect">
+            <a:avLst/>
+          </a:prstGeom>
+          <a:noFill/>
+        </p:spPr>
+        <p:txBody>
+          <a:bodyPr wrap="square">
+            <a:spAutoFit/>
+          </a:bodyPr>
+          <a:lstStyle/>
+          <a:p>
+            <a:pPr algn="l"/>
+            <a:r>
+              <a:rPr sz="1600" b="1" i="0">
+                <a:solidFill>
+                  <a:srgbClr val="14285A"/>
+                </a:solidFill>
+              </a:rPr>
+              <a:t>BACKUP  ·  glossary  (1/2) — sequence &amp; method</a:t>
+            </a:r>
+          </a:p>
+        </p:txBody>
+      </p:sp>
+      <p:sp>
+        <p:nvSpPr>
+          <p:cNvPr id="4" name="TextBox 3"/>
+          <p:cNvSpPr txBox="1"/>
+          <p:nvPr/>
+        </p:nvSpPr>
+        <p:spPr>
+          <a:xfrm>
+            <a:off x="502920" y="1280160"/>
+            <a:ext cx="5486400" cy="365760"/>
+          </a:xfrm>
+          <a:prstGeom prst="rect">
+            <a:avLst/>
+          </a:prstGeom>
+          <a:noFill/>
+        </p:spPr>
+        <p:txBody>
+          <a:bodyPr wrap="square">
+            <a:spAutoFit/>
+          </a:bodyPr>
+          <a:lstStyle/>
+          <a:p>
+            <a:pPr algn="l"/>
+            <a:r>
+              <a:rPr sz="1350" b="1" i="0">
+                <a:solidFill>
+                  <a:srgbClr val="285FAF"/>
+                </a:solidFill>
+              </a:rPr>
+              <a:t>THE SEQUENCE WORLD</a:t>
+            </a:r>
+          </a:p>
+        </p:txBody>
+      </p:sp>
+      <p:sp>
+        <p:nvSpPr>
+          <p:cNvPr id="5" name="TextBox 4"/>
+          <p:cNvSpPr txBox="1"/>
+          <p:nvPr/>
+        </p:nvSpPr>
+        <p:spPr>
+          <a:xfrm>
+            <a:off x="502920" y="1737360"/>
+            <a:ext cx="5486400" cy="4937760"/>
+          </a:xfrm>
+          <a:prstGeom prst="rect">
+            <a:avLst/>
+          </a:prstGeom>
+          <a:noFill/>
+        </p:spPr>
+        <p:txBody>
+          <a:bodyPr wrap="square">
+            <a:spAutoFit/>
+          </a:bodyPr>
+          <a:lstStyle/>
+          <a:p>
+            <a:pPr>
+              <a:spcAft>
+                <a:spcPts val="700"/>
+              </a:spcAft>
+            </a:pPr>
+            <a:r>
+              <a:rPr sz="1200" b="1">
+                <a:solidFill>
+                  <a:srgbClr val="14285A"/>
+                </a:solidFill>
+              </a:rPr>
+              <a:t>copy</a:t>
+            </a:r>
+            <a:r>
+              <a:rPr sz="1050">
+                <a:solidFill>
+                  <a:srgbClr val="585C66"/>
+                </a:solidFill>
+              </a:rPr>
+              <a:t>  —  a genomic instance of a gene — a path through the graph</a:t>
+            </a:r>
+          </a:p>
+          <a:p>
+            <a:pPr>
+              <a:spcAft>
+                <a:spcPts val="700"/>
+              </a:spcAft>
+            </a:pPr>
+            <a:r>
+              <a:rPr sz="1200" b="1">
+                <a:solidFill>
+                  <a:srgbClr val="14285A"/>
+                </a:solidFill>
+              </a:rPr>
+              <a:t>isoform</a:t>
+            </a:r>
+            <a:r>
+              <a:rPr sz="1050">
+                <a:solidFill>
+                  <a:srgbClr val="585C66"/>
+                </a:solidFill>
+              </a:rPr>
+              <a:t>  —  a splice variant of ONE gene — a path through the junctions</a:t>
+            </a:r>
+          </a:p>
+          <a:p>
+            <a:pPr>
+              <a:spcAft>
+                <a:spcPts val="700"/>
+              </a:spcAft>
+            </a:pPr>
+            <a:r>
+              <a:rPr sz="1200" b="1">
+                <a:solidFill>
+                  <a:srgbClr val="14285A"/>
+                </a:solidFill>
+              </a:rPr>
+              <a:t>exon / intron</a:t>
+            </a:r>
+            <a:r>
+              <a:rPr sz="1050">
+                <a:solidFill>
+                  <a:srgbClr val="585C66"/>
+                </a:solidFill>
+              </a:rPr>
+              <a:t>  —  kept in the mRNA  /  spliced out</a:t>
+            </a:r>
+          </a:p>
+          <a:p>
+            <a:pPr>
+              <a:spcAft>
+                <a:spcPts val="700"/>
+              </a:spcAft>
+            </a:pPr>
+            <a:r>
+              <a:rPr sz="1200" b="1">
+                <a:solidFill>
+                  <a:srgbClr val="14285A"/>
+                </a:solidFill>
+              </a:rPr>
+              <a:t>splice junction</a:t>
+            </a:r>
+            <a:r>
+              <a:rPr sz="1050">
+                <a:solidFill>
+                  <a:srgbClr val="585C66"/>
+                </a:solidFill>
+              </a:rPr>
+              <a:t>  —  where two exons join (a branch point)</a:t>
+            </a:r>
+          </a:p>
+          <a:p>
+            <a:pPr>
+              <a:spcAft>
+                <a:spcPts val="700"/>
+              </a:spcAft>
+            </a:pPr>
+            <a:r>
+              <a:rPr sz="1200" b="1">
+                <a:solidFill>
+                  <a:srgbClr val="14285A"/>
+                </a:solidFill>
+              </a:rPr>
+              <a:t>allele</a:t>
+            </a:r>
+            <a:r>
+              <a:rPr sz="1050">
+                <a:solidFill>
+                  <a:srgbClr val="585C66"/>
+                </a:solidFill>
+              </a:rPr>
+              <a:t>  —  the base at a variant position</a:t>
+            </a:r>
+          </a:p>
+          <a:p>
+            <a:pPr>
+              <a:spcAft>
+                <a:spcPts val="700"/>
+              </a:spcAft>
+            </a:pPr>
+            <a:r>
+              <a:rPr sz="1200" b="1">
+                <a:solidFill>
+                  <a:srgbClr val="14285A"/>
+                </a:solidFill>
+              </a:rPr>
+              <a:t>PSV</a:t>
+            </a:r>
+            <a:r>
+              <a:rPr sz="1050">
+                <a:solidFill>
+                  <a:srgbClr val="585C66"/>
+                </a:solidFill>
+              </a:rPr>
+              <a:t>  —  a position where copies differ (a bubble)</a:t>
+            </a:r>
+          </a:p>
+          <a:p>
+            <a:pPr>
+              <a:spcAft>
+                <a:spcPts val="700"/>
+              </a:spcAft>
+            </a:pPr>
+            <a:r>
+              <a:rPr sz="1200" b="1">
+                <a:solidFill>
+                  <a:srgbClr val="14285A"/>
+                </a:solidFill>
+              </a:rPr>
+              <a:t>SUN</a:t>
+            </a:r>
+            <a:r>
+              <a:rPr sz="1050">
+                <a:solidFill>
+                  <a:srgbClr val="585C66"/>
+                </a:solidFill>
+              </a:rPr>
+              <a:t>  —  a PSV private to ONE copy  (SUN ⊆ PSV) → one read pins it</a:t>
+            </a:r>
+          </a:p>
+        </p:txBody>
+      </p:sp>
+      <p:sp>
+        <p:nvSpPr>
+          <p:cNvPr id="6" name="TextBox 5"/>
+          <p:cNvSpPr txBox="1"/>
+          <p:nvPr/>
+        </p:nvSpPr>
+        <p:spPr>
+          <a:xfrm>
+            <a:off x="6355080" y="1280160"/>
+            <a:ext cx="5577840" cy="365760"/>
+          </a:xfrm>
+          <a:prstGeom prst="rect">
+            <a:avLst/>
+          </a:prstGeom>
+          <a:noFill/>
+        </p:spPr>
+        <p:txBody>
+          <a:bodyPr wrap="square">
+            <a:spAutoFit/>
+          </a:bodyPr>
+          <a:lstStyle/>
+          <a:p>
+            <a:pPr algn="l"/>
+            <a:r>
+              <a:rPr sz="1350" b="1" i="0">
+                <a:solidFill>
+                  <a:srgbClr val="1E7837"/>
+                </a:solidFill>
+              </a:rPr>
+              <a:t>OUR METHOD OBJECTS</a:t>
+            </a:r>
+          </a:p>
+        </p:txBody>
+      </p:sp>
+      <p:sp>
+        <p:nvSpPr>
+          <p:cNvPr id="7" name="TextBox 6"/>
+          <p:cNvSpPr txBox="1"/>
+          <p:nvPr/>
+        </p:nvSpPr>
+        <p:spPr>
+          <a:xfrm>
+            <a:off x="6355080" y="1737360"/>
+            <a:ext cx="5577840" cy="4937760"/>
+          </a:xfrm>
+          <a:prstGeom prst="rect">
+            <a:avLst/>
+          </a:prstGeom>
+          <a:noFill/>
+        </p:spPr>
+        <p:txBody>
+          <a:bodyPr wrap="square">
+            <a:spAutoFit/>
+          </a:bodyPr>
+          <a:lstStyle/>
+          <a:p>
+            <a:pPr>
+              <a:spcAft>
+                <a:spcPts val="700"/>
+              </a:spcAft>
+            </a:pPr>
+            <a:r>
+              <a:rPr sz="1200" b="1">
+                <a:solidFill>
+                  <a:srgbClr val="14285A"/>
+                </a:solidFill>
+              </a:rPr>
+              <a:t>variation graph</a:t>
+            </a:r>
+            <a:r>
+              <a:rPr sz="1050">
+                <a:solidFill>
+                  <a:srgbClr val="585C66"/>
+                </a:solidFill>
+              </a:rPr>
+              <a:t>  —  spine + PSV bubbles + junction branches; copies/isoforms = paths</a:t>
+            </a:r>
+          </a:p>
+          <a:p>
+            <a:pPr>
+              <a:spcAft>
+                <a:spcPts val="700"/>
+              </a:spcAft>
+            </a:pPr>
+            <a:r>
+              <a:rPr sz="1200" b="1">
+                <a:solidFill>
+                  <a:srgbClr val="14285A"/>
+                </a:solidFill>
+              </a:rPr>
+              <a:t>bubble</a:t>
+            </a:r>
+            <a:r>
+              <a:rPr sz="1050">
+                <a:solidFill>
+                  <a:srgbClr val="585C66"/>
+                </a:solidFill>
+              </a:rPr>
+              <a:t>  —  where paths diverge — a PSV or a junction</a:t>
+            </a:r>
+          </a:p>
+          <a:p>
+            <a:pPr>
+              <a:spcAft>
+                <a:spcPts val="700"/>
+              </a:spcAft>
+            </a:pPr>
+            <a:r>
+              <a:rPr sz="1200" b="1">
+                <a:solidFill>
+                  <a:srgbClr val="14285A"/>
+                </a:solidFill>
+              </a:rPr>
+              <a:t>family  (O1)</a:t>
+            </a:r>
+            <a:r>
+              <a:rPr sz="1050">
+                <a:solidFill>
+                  <a:srgbClr val="585C66"/>
+                </a:solidFill>
+              </a:rPr>
+              <a:t>  —  a cohesive homology cluster of loci (γ-quasi-clique)</a:t>
+            </a:r>
+          </a:p>
+          <a:p>
+            <a:pPr>
+              <a:spcAft>
+                <a:spcPts val="700"/>
+              </a:spcAft>
+            </a:pPr>
+            <a:r>
+              <a:rPr sz="1200" b="1">
+                <a:solidFill>
+                  <a:srgbClr val="14285A"/>
+                </a:solidFill>
+              </a:rPr>
+              <a:t>copy number  χ_H</a:t>
+            </a:r>
+            <a:r>
+              <a:rPr sz="1050">
+                <a:solidFill>
+                  <a:srgbClr val="585C66"/>
+                </a:solidFill>
+              </a:rPr>
+              <a:t>  —  fewest copy-paths covering the reads — a lower bound</a:t>
+            </a:r>
+          </a:p>
+          <a:p>
+            <a:pPr>
+              <a:spcAft>
+                <a:spcPts val="700"/>
+              </a:spcAft>
+            </a:pPr>
+            <a:r>
+              <a:rPr sz="1200" b="1">
+                <a:solidFill>
+                  <a:srgbClr val="14285A"/>
+                </a:solidFill>
+              </a:rPr>
+              <a:t>assignment  (O2)</a:t>
+            </a:r>
+            <a:r>
+              <a:rPr sz="1050">
+                <a:solidFill>
+                  <a:srgbClr val="585C66"/>
+                </a:solidFill>
+              </a:rPr>
+              <a:t>  —  which copy-path a read is on (facility location; no 1/k)</a:t>
+            </a:r>
+          </a:p>
+          <a:p>
+            <a:pPr>
+              <a:spcAft>
+                <a:spcPts val="700"/>
+              </a:spcAft>
+            </a:pPr>
+            <a:r>
+              <a:rPr sz="1200" b="1">
+                <a:solidFill>
+                  <a:srgbClr val="14285A"/>
+                </a:solidFill>
+              </a:rPr>
+              <a:t>reference-absent  (O4)</a:t>
+            </a:r>
+            <a:r>
+              <a:rPr sz="1050">
+                <a:solidFill>
+                  <a:srgbClr val="585C66"/>
+                </a:solidFill>
+              </a:rPr>
+              <a:t>  —  a copy the individual has but the assembly lacks</a:t>
+            </a:r>
+          </a:p>
+          <a:p>
+            <a:pPr>
+              <a:spcAft>
+                <a:spcPts val="700"/>
+              </a:spcAft>
+            </a:pPr>
+            <a:r>
+              <a:rPr sz="1200" b="1">
+                <a:solidFill>
+                  <a:srgbClr val="14285A"/>
+                </a:solidFill>
+              </a:rPr>
+              <a:t>allele-specific jn  (O3)</a:t>
+            </a:r>
+            <a:r>
+              <a:rPr sz="1050">
+                <a:solidFill>
+                  <a:srgbClr val="585C66"/>
+                </a:solidFill>
+              </a:rPr>
+              <a:t>  —  an allele linked to its junction on one read</a:t>
+            </a:r>
+          </a:p>
+          <a:p>
+            <a:pPr>
+              <a:spcAft>
+                <a:spcPts val="700"/>
+              </a:spcAft>
+            </a:pPr>
+            <a:r>
+              <a:rPr sz="1200" b="1">
+                <a:solidFill>
+                  <a:srgbClr val="14285A"/>
+                </a:solidFill>
+              </a:rPr>
+              <a:t>K=0 floor</a:t>
+            </a:r>
+            <a:r>
+              <a:rPr sz="1050">
+                <a:solidFill>
+                  <a:srgbClr val="585C66"/>
+                </a:solidFill>
+              </a:rPr>
+              <a:t>  —  identical copies carry no PSV → certified TIED, not guessed</a:t>
+            </a:r>
+          </a:p>
+        </p:txBody>
+      </p:sp>
+    </p:spTree>
+  </p:cSld>
+  <p:clrMapOvr>
+    <a:masterClrMapping/>
+  </p:clrMapOvr>
+</p:sld>
+</file>
+
+<file path=ppt/slides/slide13.xml><?xml version="1.0" encoding="utf-8"?>
+<p:sld xmlns:a="http://schemas.openxmlformats.org/drawingml/2006/main" xmlns:p="http://schemas.openxmlformats.org/presentationml/2006/main" xmlns:r="http://schemas.openxmlformats.org/officeDocument/2006/relationships">
+  <p:cSld>
+    <p:spTree>
+      <p:nvGrpSpPr>
+        <p:cNvPr id="1" name=""/>
+        <p:cNvGrpSpPr/>
+        <p:nvPr/>
+      </p:nvGrpSpPr>
+      <p:grpSpPr/>
+      <p:sp>
+        <p:nvSpPr>
+          <p:cNvPr id="2" name="Rectangle 1"/>
+          <p:cNvSpPr/>
+          <p:nvPr/>
+        </p:nvSpPr>
+        <p:spPr>
+          <a:xfrm>
+            <a:off x="0" y="0"/>
+            <a:ext cx="310896" cy="6858000"/>
+          </a:xfrm>
+          <a:prstGeom prst="rect">
+            <a:avLst/>
+          </a:prstGeom>
+          <a:solidFill>
+            <a:srgbClr val="14285A"/>
+          </a:solidFill>
+          <a:ln>
+            <a:noFill/>
+          </a:ln>
+        </p:spPr>
+        <p:style>
+          <a:lnRef idx="1">
+            <a:schemeClr val="accent1"/>
+          </a:lnRef>
+          <a:fillRef idx="3">
+            <a:schemeClr val="accent1"/>
+          </a:fillRef>
+          <a:effectRef idx="2">
+            <a:schemeClr val="accent1"/>
+          </a:effectRef>
+          <a:fontRef idx="minor">
+            <a:schemeClr val="lt1"/>
+          </a:fontRef>
+        </p:style>
+        <p:txBody>
+          <a:bodyPr rtlCol="0" anchor="ctr"/>
+          <a:lstStyle/>
+          <a:p>
+            <a:pPr algn="ctr"/>
+          </a:p>
+        </p:txBody>
+      </p:sp>
+      <p:sp>
+        <p:nvSpPr>
+          <p:cNvPr id="3" name="TextBox 2"/>
+          <p:cNvSpPr txBox="1"/>
+          <p:nvPr/>
+        </p:nvSpPr>
+        <p:spPr>
+          <a:xfrm>
+            <a:off x="777240" y="457200"/>
+            <a:ext cx="10789920" cy="457200"/>
+          </a:xfrm>
+          <a:prstGeom prst="rect">
+            <a:avLst/>
+          </a:prstGeom>
+          <a:noFill/>
+        </p:spPr>
+        <p:txBody>
+          <a:bodyPr wrap="square">
+            <a:spAutoFit/>
+          </a:bodyPr>
+          <a:lstStyle/>
+          <a:p>
+            <a:pPr algn="l"/>
+            <a:r>
+              <a:rPr sz="1600" b="1" i="0">
+                <a:solidFill>
+                  <a:srgbClr val="14285A"/>
+                </a:solidFill>
+              </a:rPr>
+              <a:t>BACKUP  ·  glossary  (2/2) — evolution</a:t>
+            </a:r>
+          </a:p>
+        </p:txBody>
+      </p:sp>
+      <p:sp>
+        <p:nvSpPr>
+          <p:cNvPr id="4" name="TextBox 3"/>
+          <p:cNvSpPr txBox="1"/>
+          <p:nvPr/>
+        </p:nvSpPr>
+        <p:spPr>
+          <a:xfrm>
+            <a:off x="502920" y="1280160"/>
+            <a:ext cx="11338560" cy="365760"/>
+          </a:xfrm>
+          <a:prstGeom prst="rect">
+            <a:avLst/>
+          </a:prstGeom>
+          <a:noFill/>
+        </p:spPr>
+        <p:txBody>
+          <a:bodyPr wrap="square">
+            <a:spAutoFit/>
+          </a:bodyPr>
+          <a:lstStyle/>
+          <a:p>
+            <a:pPr algn="l"/>
+            <a:r>
+              <a:rPr sz="1350" b="1" i="0">
+                <a:solidFill>
+                  <a:srgbClr val="C8780F"/>
+                </a:solidFill>
+              </a:rPr>
+              <a:t>THE EVOLUTION WORLD</a:t>
+            </a:r>
+          </a:p>
+        </p:txBody>
+      </p:sp>
+      <p:sp>
+        <p:nvSpPr>
+          <p:cNvPr id="5" name="TextBox 4"/>
+          <p:cNvSpPr txBox="1"/>
+          <p:nvPr/>
+        </p:nvSpPr>
+        <p:spPr>
+          <a:xfrm>
+            <a:off x="502920" y="1737360"/>
+            <a:ext cx="11338560" cy="4937760"/>
+          </a:xfrm>
+          <a:prstGeom prst="rect">
+            <a:avLst/>
+          </a:prstGeom>
+          <a:noFill/>
+        </p:spPr>
+        <p:txBody>
+          <a:bodyPr wrap="square">
+            <a:spAutoFit/>
+          </a:bodyPr>
+          <a:lstStyle/>
+          <a:p>
+            <a:pPr>
+              <a:spcAft>
+                <a:spcPts val="700"/>
+              </a:spcAft>
+            </a:pPr>
+            <a:r>
+              <a:rPr sz="1200" b="1">
+                <a:solidFill>
+                  <a:srgbClr val="14285A"/>
+                </a:solidFill>
+              </a:rPr>
+              <a:t>paralog</a:t>
+            </a:r>
+            <a:r>
+              <a:rPr sz="1050">
+                <a:solidFill>
+                  <a:srgbClr val="585C66"/>
+                </a:solidFill>
+              </a:rPr>
+              <a:t>  —  two genes related by DUPLICATION (within a lineage)</a:t>
+            </a:r>
+          </a:p>
+          <a:p>
+            <a:pPr>
+              <a:spcAft>
+                <a:spcPts val="700"/>
+              </a:spcAft>
+            </a:pPr>
+            <a:r>
+              <a:rPr sz="1200" b="1">
+                <a:solidFill>
+                  <a:srgbClr val="14285A"/>
+                </a:solidFill>
+              </a:rPr>
+              <a:t>ortholog</a:t>
+            </a:r>
+            <a:r>
+              <a:rPr sz="1050">
+                <a:solidFill>
+                  <a:srgbClr val="585C66"/>
+                </a:solidFill>
+              </a:rPr>
+              <a:t>  —  two genes related by SPECIATION (the same gene in two species)</a:t>
+            </a:r>
+          </a:p>
+          <a:p>
+            <a:pPr>
+              <a:spcAft>
+                <a:spcPts val="700"/>
+              </a:spcAft>
+            </a:pPr>
+            <a:r>
+              <a:rPr sz="1200" b="1">
+                <a:solidFill>
+                  <a:srgbClr val="14285A"/>
+                </a:solidFill>
+              </a:rPr>
+              <a:t>multi-copy gene family</a:t>
+            </a:r>
+            <a:r>
+              <a:rPr sz="1050">
+                <a:solidFill>
+                  <a:srgbClr val="585C66"/>
+                </a:solidFill>
+              </a:rPr>
+              <a:t>  —  ≥ 2 paralogs present in one genome — the state we measure</a:t>
+            </a:r>
+          </a:p>
+          <a:p>
+            <a:pPr>
+              <a:spcAft>
+                <a:spcPts val="700"/>
+              </a:spcAft>
+            </a:pPr>
+            <a:r>
+              <a:rPr sz="1200" b="1">
+                <a:solidFill>
+                  <a:srgbClr val="14285A"/>
+                </a:solidFill>
+              </a:rPr>
+              <a:t>segmental duplication (SD)</a:t>
+            </a:r>
+            <a:r>
+              <a:rPr sz="1050">
+                <a:solidFill>
+                  <a:srgbClr val="585C66"/>
+                </a:solidFill>
+              </a:rPr>
+              <a:t>  —  a duplicated DNA block (≥ 1 kb, high identity); SD98 = ≥ 98%</a:t>
+            </a:r>
+          </a:p>
+          <a:p>
+            <a:pPr>
+              <a:spcAft>
+                <a:spcPts val="700"/>
+              </a:spcAft>
+            </a:pPr>
+            <a:r>
+              <a:rPr sz="1200" b="1">
+                <a:solidFill>
+                  <a:srgbClr val="14285A"/>
+                </a:solidFill>
+              </a:rPr>
+              <a:t>expansion</a:t>
+            </a:r>
+            <a:r>
+              <a:rPr sz="1050">
+                <a:solidFill>
+                  <a:srgbClr val="585C66"/>
+                </a:solidFill>
+              </a:rPr>
+              <a:t>  —  copies GAINED on a lineage vs its ancestor (needs an outgroup)</a:t>
+            </a:r>
+          </a:p>
+          <a:p>
+            <a:pPr>
+              <a:spcAft>
+                <a:spcPts val="700"/>
+              </a:spcAft>
+            </a:pPr>
+            <a:r>
+              <a:rPr sz="1200" b="1">
+                <a:solidFill>
+                  <a:srgbClr val="14285A"/>
+                </a:solidFill>
+              </a:rPr>
+              <a:t>contraction</a:t>
+            </a:r>
+            <a:r>
+              <a:rPr sz="1050">
+                <a:solidFill>
+                  <a:srgbClr val="585C66"/>
+                </a:solidFill>
+              </a:rPr>
+              <a:t>  —  copies LOST on a lineage</a:t>
+            </a:r>
+          </a:p>
+          <a:p>
+            <a:pPr>
+              <a:spcAft>
+                <a:spcPts val="700"/>
+              </a:spcAft>
+            </a:pPr>
+            <a:r>
+              <a:rPr sz="1200" b="1">
+                <a:solidFill>
+                  <a:srgbClr val="14285A"/>
+                </a:solidFill>
+              </a:rPr>
+              <a:t>pseudogene</a:t>
+            </a:r>
+            <a:r>
+              <a:rPr sz="1050">
+                <a:solidFill>
+                  <a:srgbClr val="585C66"/>
+                </a:solidFill>
+              </a:rPr>
+              <a:t>  —  a copy that lost function (processed = intronless retrocopy)</a:t>
+            </a:r>
+          </a:p>
+          <a:p>
+            <a:pPr>
+              <a:spcAft>
+                <a:spcPts val="700"/>
+              </a:spcAft>
+            </a:pPr>
+            <a:r>
+              <a:rPr sz="1200" b="1">
+                <a:solidFill>
+                  <a:srgbClr val="14285A"/>
+                </a:solidFill>
+              </a:rPr>
+              <a:t>retrocopy / retrogene</a:t>
+            </a:r>
+            <a:r>
+              <a:rPr sz="1050">
+                <a:solidFill>
+                  <a:srgbClr val="585C66"/>
+                </a:solidFill>
+              </a:rPr>
+              <a:t>  —  an mRNA-derived, intronless copy</a:t>
+            </a:r>
+          </a:p>
+          <a:p>
+            <a:pPr>
+              <a:spcAft>
+                <a:spcPts val="700"/>
+              </a:spcAft>
+            </a:pPr>
+            <a:r>
+              <a:rPr sz="1200" b="1">
+                <a:solidFill>
+                  <a:srgbClr val="14285A"/>
+                </a:solidFill>
+              </a:rPr>
+              <a:t>exonization</a:t>
+            </a:r>
+            <a:r>
+              <a:rPr sz="1050">
+                <a:solidFill>
+                  <a:srgbClr val="585C66"/>
+                </a:solidFill>
+              </a:rPr>
+              <a:t>  —  non-coding sequence (intron / Alu) becoming a new EXON</a:t>
+            </a:r>
+          </a:p>
+        </p:txBody>
+      </p:sp>
+      <p:sp>
+        <p:nvSpPr>
+          <p:cNvPr id="6" name="Rectangle 5"/>
+          <p:cNvSpPr/>
+          <p:nvPr/>
+        </p:nvSpPr>
+        <p:spPr>
+          <a:xfrm>
+            <a:off x="457200" y="5212080"/>
+            <a:ext cx="11338560" cy="1234440"/>
+          </a:xfrm>
+          <a:prstGeom prst="rect">
+            <a:avLst/>
+          </a:prstGeom>
+          <a:solidFill>
+            <a:srgbClr val="F4F7FB"/>
+          </a:solidFill>
+          <a:ln w="12700">
+            <a:solidFill>
+              <a:srgbClr val="14285A"/>
+            </a:solidFill>
+          </a:ln>
+        </p:spPr>
+        <p:style>
+          <a:lnRef idx="1">
+            <a:schemeClr val="accent1"/>
+          </a:lnRef>
+          <a:fillRef idx="3">
+            <a:schemeClr val="accent1"/>
+          </a:fillRef>
+          <a:effectRef idx="2">
+            <a:schemeClr val="accent1"/>
+          </a:effectRef>
+          <a:fontRef idx="minor">
+            <a:schemeClr val="lt1"/>
+          </a:fontRef>
+        </p:style>
+        <p:txBody>
+          <a:bodyPr rtlCol="0" anchor="ctr"/>
+          <a:lstStyle/>
+          <a:p>
+            <a:pPr algn="ctr"/>
+          </a:p>
+        </p:txBody>
+      </p:sp>
+      <p:sp>
+        <p:nvSpPr>
+          <p:cNvPr id="7" name="TextBox 6"/>
+          <p:cNvSpPr txBox="1"/>
+          <p:nvPr/>
+        </p:nvSpPr>
+        <p:spPr>
+          <a:xfrm>
+            <a:off x="685800" y="5349240"/>
+            <a:ext cx="10972800" cy="365760"/>
+          </a:xfrm>
+          <a:prstGeom prst="rect">
+            <a:avLst/>
+          </a:prstGeom>
+          <a:noFill/>
+        </p:spPr>
+        <p:txBody>
+          <a:bodyPr wrap="square">
+            <a:spAutoFit/>
+          </a:bodyPr>
+          <a:lstStyle/>
+          <a:p>
+            <a:pPr algn="l"/>
+            <a:r>
+              <a:rPr sz="1200" b="1" i="0">
+                <a:solidFill>
+                  <a:srgbClr val="14285A"/>
+                </a:solidFill>
+              </a:rPr>
+              <a:t>the relationships that trip people:</a:t>
+            </a:r>
+          </a:p>
+        </p:txBody>
+      </p:sp>
+      <p:sp>
+        <p:nvSpPr>
+          <p:cNvPr id="8" name="TextBox 7"/>
+          <p:cNvSpPr txBox="1"/>
+          <p:nvPr/>
+        </p:nvSpPr>
+        <p:spPr>
+          <a:xfrm>
+            <a:off x="685800" y="5742432"/>
+            <a:ext cx="10972800" cy="731520"/>
+          </a:xfrm>
+          <a:prstGeom prst="rect">
+            <a:avLst/>
+          </a:prstGeom>
+          <a:noFill/>
+        </p:spPr>
+        <p:txBody>
+          <a:bodyPr wrap="square">
+            <a:spAutoFit/>
+          </a:bodyPr>
+          <a:lstStyle/>
+          <a:p>
+            <a:pPr algn="l"/>
+            <a:r>
+              <a:rPr sz="1100" b="0" i="0">
+                <a:solidFill>
+                  <a:srgbClr val="232328"/>
+                </a:solidFill>
+              </a:rPr>
+              <a:t>SUN ⊆ PSV     ·     paralog = the relationship,  multi-copy family = the state we measure,  SD = the DNA mechanism,  expansion = the cross-species change     ·     copy (bubbles) vs isoform (junctions) = two axes of ONE variation graph</a:t>
+            </a:r>
+          </a:p>
+        </p:txBody>
+      </p:sp>
+    </p:spTree>
+  </p:cSld>
+  <p:clrMapOvr>
+    <a:masterClrMapping/>
+  </p:clrMapOvr>
+</p:sld>
+</file>
+
 <file path=ppt/slides/slide2.xml><?xml version="1.0" encoding="utf-8"?>
 <p:sld xmlns:a="http://schemas.openxmlformats.org/drawingml/2006/main" xmlns:p="http://schemas.openxmlformats.org/presentationml/2006/main" xmlns:r="http://schemas.openxmlformats.org/officeDocument/2006/relationships">
   <p:cSld>
@@ -3574,7 +4944,7 @@
                   <a:srgbClr val="14285A"/>
                 </a:solidFill>
               </a:rPr>
-              <a:t>A set of loci the reads cannot tell apart: a connected component of the transcribed-homology graph, over ≥ 2 distinct loci.</a:t>
+              <a:t>A set of mutually-homologous loci: a cohesive, dense cluster (a γ-quasi-clique) in the transcribed-homology graph, over ≥ 2 distinct loci.</a:t>
             </a:r>
           </a:p>
         </p:txBody>
@@ -3612,7 +4982,7 @@
                   <a:srgbClr val="6E737D"/>
                 </a:solidFill>
               </a:rPr>
-              <a:t>Copy number = χ(H): the MINIMUM number of copies that explains the ambiguity (a minimum clique cover). No “≥ X% identical” cutoff — a relational tie, annotation-free.</a:t>
+              <a:t>The boundary is a relational homology tie — no “≥ X% identical” cutoff, annotation-free. Copy number = the fewest copy-paths that explain the reads (a minimum path cover; a lower bound).</a:t>
             </a:r>
           </a:p>
         </p:txBody>

--- a/bench/slides/method_punchlines.pptx
+++ b/bench/slides/method_punchlines.pptx
@@ -3509,8 +3509,8 @@
         </p:blipFill>
         <p:spPr>
           <a:xfrm>
-            <a:off x="954872" y="1783080"/>
-            <a:ext cx="10281949" cy="4297680"/>
+            <a:off x="979859" y="1783080"/>
+            <a:ext cx="10231976" cy="4297680"/>
           </a:xfrm>
           <a:prstGeom prst="rect">
             <a:avLst/>
@@ -4008,7 +4008,7 @@
                   <a:srgbClr val="585C66"/>
                 </a:solidFill>
               </a:rPr>
-              <a:t>  —  fewest copy-paths covering the reads — a lower bound</a:t>
+              <a:t>  —  chromatic number of the read-conflict graph = Minimum Copy Cover (Lemma 1); a lower bound</a:t>
             </a:r>
           </a:p>
           <a:p>
@@ -4982,7 +4982,7 @@
                   <a:srgbClr val="6E737D"/>
                 </a:solidFill>
               </a:rPr>
-              <a:t>The boundary is a relational homology tie — no “≥ X% identical” cutoff, annotation-free. Copy number = the fewest copy-paths that explain the reads (a minimum path cover; a lower bound).</a:t>
+              <a:t>The boundary is a relational homology tie — no “≥ X% identical” cutoff, annotation-free. Copy number = χ_H, the chromatic number of the read-conflict graph (Minimum Copy Cover, Lemma 1) — a lower bound.</a:t>
             </a:r>
           </a:p>
         </p:txBody>
